--- a/session1/mcp-intro.pptx
+++ b/session1/mcp-intro.pptx
@@ -17,6 +17,8 @@
     <p:sldId id="263" r:id="rId9"/>
     <p:sldId id="266" r:id="rId17"/>
     <p:sldId id="267" r:id="rId18"/>
+    <p:sldId id="268" r:id="rId19"/>
+    <p:sldId id="269" r:id="rId20"/>
   </p:sldIdLst>
   <p:notesMasterIdLst>
     <p:notesMasterId r:id="rId10"/>
@@ -1753,7 +1755,7 @@
                 <a:ea typeface="Hiragino Sans" pitchFamily="34" charset="-122"/>
                 <a:cs typeface="Hiragino Sans" pitchFamily="34" charset="-120"/>
               </a:rPr>
-              <a:t>03 / 12</a:t>
+              <a:t>03 / 14</a:t>
             </a:r>
             <a:endParaRPr lang="en-US" sz="1000" dirty="0"/>
           </a:p>
@@ -2005,7 +2007,7 @@
                 <a:ea typeface="Hiragino Sans" pitchFamily="34" charset="-122"/>
                 <a:cs typeface="Hiragino Sans" pitchFamily="34" charset="-120"/>
               </a:rPr>
-              <a:t>01 / 12</a:t>
+              <a:t>01 / 14</a:t>
             </a:r>
             <a:endParaRPr lang="en-US" sz="1000" dirty="0"/>
           </a:p>
@@ -2218,7 +2220,7 @@
                 <a:ea typeface="Hiragino Sans" pitchFamily="34" charset="-122"/>
                 <a:cs typeface="Hiragino Sans" pitchFamily="34" charset="-120"/>
               </a:rPr>
-              <a:t>11 / 12</a:t>
+              <a:t>11 / 14</a:t>
             </a:r>
             <a:endParaRPr lang="en-US" sz="1000" dirty="0"/>
           </a:p>
@@ -2417,7 +2419,7 @@
                 <a:ea typeface="Hiragino Sans" pitchFamily="34" charset="-122"/>
                 <a:cs typeface="Hiragino Sans" pitchFamily="34" charset="-120"/>
               </a:rPr>
-              <a:t>12 / 12</a:t>
+              <a:t>12 / 14</a:t>
             </a:r>
             <a:endParaRPr lang="en-US" sz="1000" dirty="0"/>
           </a:p>
@@ -2732,7 +2734,7 @@
                 <a:ea typeface="Hiragino Sans" pitchFamily="34" charset="-122"/>
                 <a:cs typeface="Hiragino Sans" pitchFamily="34" charset="-120"/>
               </a:rPr>
-              <a:t>資料をまとめて活用</a:t>
+              <a:t>一定の目的・文脈をもったチャットの集合。AI の過去記憶も分離して保持される。</a:t>
             </a:r>
           </a:p>
           <a:p>
@@ -2767,7 +2769,7 @@
                 <a:ea typeface="Hiragino Sans" pitchFamily="34" charset="-122"/>
                 <a:cs typeface="Hiragino Sans" pitchFamily="34" charset="-120"/>
               </a:rPr>
-              <a:t>文書・コード・図を生成</a:t>
+              <a:t>ウェブサイトやツールの作成・公開など</a:t>
             </a:r>
           </a:p>
         </p:txBody>
@@ -2856,7 +2858,7 @@
                 <a:ea typeface="Hiragino Sans" pitchFamily="34" charset="-122"/>
                 <a:cs typeface="Hiragino Sans" pitchFamily="34" charset="-120"/>
               </a:rPr>
-              <a:t>PC のファイルを元に作業</a:t>
+              <a:t>PC を使った作業全般</a:t>
             </a:r>
           </a:p>
         </p:txBody>
@@ -2894,7 +2896,7 @@
                 <a:ea typeface="Hiragino Sans" pitchFamily="34" charset="-122"/>
                 <a:cs typeface="Hiragino Sans" pitchFamily="34" charset="-120"/>
               </a:rPr>
-              <a:t>ローカル操作</a:t>
+              <a:t>PC 設定</a:t>
             </a:r>
           </a:p>
           <a:p>
@@ -2910,7 +2912,7 @@
                 <a:ea typeface="Hiragino Sans" pitchFamily="34" charset="-122"/>
                 <a:cs typeface="Hiragino Sans" pitchFamily="34" charset="-120"/>
               </a:rPr>
-              <a:t>ファイルの読み書き・編集</a:t>
+              <a:t>ソフトウェアインストール・操作など</a:t>
             </a:r>
           </a:p>
           <a:p>
@@ -3021,6 +3023,1430 @@
               <a:t>目的に合わせて使い分けられる</a:t>
             </a:r>
             <a:endParaRPr lang="en-US" sz="1000" dirty="0"/>
+          </a:p>
+        </p:txBody>
+      </p:sp>
+    </p:spTree>
+  </p:cSld>
+  <p:clrMapOvr>
+    <a:masterClrMapping/>
+  </p:clrMapOvr>
+</p:sld>
+</file>
+
+<file path=ppt/slides/slide13.xml><?xml version="1.0" encoding="utf-8"?>
+<p:sld xmlns:a="http://schemas.openxmlformats.org/drawingml/2006/main" xmlns:r="http://schemas.openxmlformats.org/officeDocument/2006/relationships" xmlns:p="http://schemas.openxmlformats.org/presentationml/2006/main">
+  <p:cSld name="Slide Email Automation">
+    <p:bg>
+      <p:bgPr>
+        <a:solidFill>
+          <a:srgbClr val="F6F8FB"/>
+        </a:solidFill>
+      </p:bgPr>
+    </p:bg>
+    <p:spTree>
+      <p:nvGrpSpPr>
+        <p:cNvPr id="1" name=""/>
+        <p:cNvGrpSpPr/>
+        <p:nvPr/>
+      </p:nvGrpSpPr>
+      <p:grpSpPr>
+        <a:xfrm>
+          <a:off x="0" y="0"/>
+          <a:ext cx="0" cy="0"/>
+          <a:chOff x="0" y="0"/>
+          <a:chExt cx="0" cy="0"/>
+        </a:xfrm>
+      </p:grpSpPr>
+      <p:sp>
+        <p:nvSpPr>
+          <p:cNvPr id="2" name="Header Bar"/>
+          <p:cNvSpPr/>
+          <p:nvPr/>
+        </p:nvSpPr>
+        <p:spPr>
+          <a:xfrm>
+            <a:off x="0" y="0"/>
+            <a:ext cx="9144000" cy="777240"/>
+          </a:xfrm>
+          <a:prstGeom prst="rect">
+            <a:avLst/>
+          </a:prstGeom>
+          <a:solidFill>
+            <a:srgbClr val="0F1B3D"/>
+          </a:solidFill>
+          <a:ln w="12700">
+            <a:solidFill>
+              <a:srgbClr val="0F1B3D"/>
+            </a:solidFill>
+            <a:prstDash val="solid"/>
+          </a:ln>
+        </p:spPr>
+      </p:sp>
+      <p:sp>
+        <p:nvSpPr>
+          <p:cNvPr id="3" name="Accent Tab"/>
+          <p:cNvSpPr/>
+          <p:nvPr/>
+        </p:nvSpPr>
+        <p:spPr>
+          <a:xfrm>
+            <a:off x="457200" y="164592"/>
+            <a:ext cx="73152" cy="457200"/>
+          </a:xfrm>
+          <a:prstGeom prst="rect">
+            <a:avLst/>
+          </a:prstGeom>
+          <a:solidFill>
+            <a:srgbClr val="D97757"/>
+          </a:solidFill>
+          <a:ln w="12700">
+            <a:solidFill>
+              <a:srgbClr val="D97757"/>
+            </a:solidFill>
+            <a:prstDash val="solid"/>
+          </a:ln>
+        </p:spPr>
+      </p:sp>
+      <p:sp>
+        <p:nvSpPr>
+          <p:cNvPr id="4" name="Title"/>
+          <p:cNvSpPr/>
+          <p:nvPr/>
+        </p:nvSpPr>
+        <p:spPr>
+          <a:xfrm>
+            <a:off x="685800" y="91440"/>
+            <a:ext cx="6858000" cy="411480"/>
+          </a:xfrm>
+          <a:prstGeom prst="rect">
+            <a:avLst/>
+          </a:prstGeom>
+          <a:noFill/>
+          <a:ln/>
+        </p:spPr>
+        <p:txBody>
+          <a:bodyPr wrap="square" lIns="0" tIns="0" rIns="0" bIns="0" rtlCol="0" anchor="ctr"/>
+          <a:lstStyle/>
+          <a:p>
+            <a:pPr indent="0" marL="0">
+              <a:buNone/>
+            </a:pPr>
+            <a:r>
+              <a:rPr lang="en-US" sz="2400" b="1" dirty="0">
+                <a:solidFill>
+                  <a:srgbClr val="FFFFFF"/>
+                </a:solidFill>
+                <a:latin typeface="Trebuchet MS" pitchFamily="34" charset="0"/>
+                <a:ea typeface="Trebuchet MS" pitchFamily="34" charset="-122"/>
+                <a:cs typeface="Trebuchet MS" pitchFamily="34" charset="-120"/>
+              </a:rPr>
+              <a:t>メールチェック自動化</a:t>
+            </a:r>
+            <a:endParaRPr lang="en-US" sz="2400" dirty="0"/>
+          </a:p>
+        </p:txBody>
+      </p:sp>
+      <p:sp>
+        <p:nvSpPr>
+          <p:cNvPr id="5" name="Subtitle"/>
+          <p:cNvSpPr/>
+          <p:nvPr/>
+        </p:nvSpPr>
+        <p:spPr>
+          <a:xfrm>
+            <a:off x="685800" y="475488"/>
+            <a:ext cx="6858000" cy="237744"/>
+          </a:xfrm>
+          <a:prstGeom prst="rect">
+            <a:avLst/>
+          </a:prstGeom>
+          <a:noFill/>
+          <a:ln/>
+        </p:spPr>
+        <p:txBody>
+          <a:bodyPr wrap="square" lIns="0" tIns="0" rIns="0" bIns="0" rtlCol="0" anchor="ctr"/>
+          <a:lstStyle/>
+          <a:p>
+            <a:pPr indent="0" marL="0">
+              <a:buNone/>
+            </a:pPr>
+            <a:r>
+              <a:rPr lang="en-US" sz="1000" spc="400" kern="0" dirty="0">
+                <a:solidFill>
+                  <a:srgbClr val="9FB2D1"/>
+                </a:solidFill>
+                <a:latin typeface="Hiragino Sans" pitchFamily="34" charset="0"/>
+                <a:ea typeface="Hiragino Sans" pitchFamily="34" charset="-122"/>
+                <a:cs typeface="Hiragino Sans" pitchFamily="34" charset="-120"/>
+              </a:rPr>
+              <a:t>Automate email triage — MCP &amp; Schedule</a:t>
+            </a:r>
+            <a:endParaRPr lang="en-US" sz="1000" dirty="0"/>
+          </a:p>
+        </p:txBody>
+      </p:sp>
+      <p:sp>
+        <p:nvSpPr>
+          <p:cNvPr id="6" name="Page Number"/>
+          <p:cNvSpPr/>
+          <p:nvPr/>
+        </p:nvSpPr>
+        <p:spPr>
+          <a:xfrm>
+            <a:off x="7680960" y="274320"/>
+            <a:ext cx="1188720" cy="237744"/>
+          </a:xfrm>
+          <a:prstGeom prst="rect">
+            <a:avLst/>
+          </a:prstGeom>
+          <a:noFill/>
+          <a:ln/>
+        </p:spPr>
+        <p:txBody>
+          <a:bodyPr wrap="square" lIns="0" tIns="0" rIns="0" bIns="0" rtlCol="0" anchor="ctr"/>
+          <a:lstStyle/>
+          <a:p>
+            <a:pPr algn="r" indent="0" marL="0">
+              <a:buNone/>
+            </a:pPr>
+            <a:r>
+              <a:rPr lang="en-US" sz="1000" spc="300" kern="0" dirty="0">
+                <a:solidFill>
+                  <a:srgbClr val="D97757"/>
+                </a:solidFill>
+                <a:latin typeface="Hiragino Sans" pitchFamily="34" charset="0"/>
+                <a:ea typeface="Hiragino Sans" pitchFamily="34" charset="-122"/>
+                <a:cs typeface="Hiragino Sans" pitchFamily="34" charset="-120"/>
+              </a:rPr>
+              <a:t>13 / 14</a:t>
+            </a:r>
+            <a:endParaRPr lang="en-US" sz="1000" dirty="0"/>
+          </a:p>
+        </p:txBody>
+      </p:sp>
+      <p:sp>
+        <p:nvSpPr>
+          <p:cNvPr id="7" name="Card 1"/>
+          <p:cNvSpPr/>
+          <p:nvPr/>
+        </p:nvSpPr>
+        <p:spPr>
+          <a:xfrm>
+            <a:off x="457200" y="1005840"/>
+            <a:ext cx="8229600" cy="1200000"/>
+          </a:xfrm>
+          <a:prstGeom prst="rect">
+            <a:avLst/>
+          </a:prstGeom>
+          <a:solidFill>
+            <a:srgbClr val="FFFFFF"/>
+          </a:solidFill>
+          <a:ln w="12700">
+            <a:solidFill>
+              <a:srgbClr val="E2E8F0"/>
+            </a:solidFill>
+            <a:prstDash val="solid"/>
+          </a:ln>
+          <a:effectLst>
+            <a:outerShdw sx="100000" sy="100000" kx="0" ky="0" algn="bl" rotWithShape="0" blurRad="101600" dist="25400" dir="5400000">
+              <a:srgbClr val="000000">
+                <a:alpha val="6000"/>
+              </a:srgbClr>
+            </a:outerShdw>
+          </a:effectLst>
+        </p:spPr>
+      </p:sp>
+      <p:sp>
+        <p:nvSpPr>
+          <p:cNvPr id="8" name="Card 2"/>
+          <p:cNvSpPr/>
+          <p:nvPr/>
+        </p:nvSpPr>
+        <p:spPr>
+          <a:xfrm>
+            <a:off x="457200" y="2405840"/>
+            <a:ext cx="8229600" cy="2300000"/>
+          </a:xfrm>
+          <a:prstGeom prst="rect">
+            <a:avLst/>
+          </a:prstGeom>
+          <a:solidFill>
+            <a:srgbClr val="FFFFFF"/>
+          </a:solidFill>
+          <a:ln w="12700">
+            <a:solidFill>
+              <a:srgbClr val="E2E8F0"/>
+            </a:solidFill>
+            <a:prstDash val="solid"/>
+          </a:ln>
+          <a:effectLst>
+            <a:outerShdw sx="100000" sy="100000" kx="0" ky="0" algn="bl" rotWithShape="0" blurRad="101600" dist="25400" dir="5400000">
+              <a:srgbClr val="000000">
+                <a:alpha val="6000"/>
+              </a:srgbClr>
+            </a:outerShdw>
+          </a:effectLst>
+        </p:spPr>
+      </p:sp>
+      <p:sp>
+        <p:nvSpPr>
+          <p:cNvPr id="9" name="Number 1"/>
+          <p:cNvSpPr/>
+          <p:nvPr/>
+        </p:nvSpPr>
+        <p:spPr>
+          <a:xfrm>
+            <a:off x="685800" y="1125840"/>
+            <a:ext cx="480000" cy="480000"/>
+          </a:xfrm>
+          <a:prstGeom prst="ellipse">
+            <a:avLst/>
+          </a:prstGeom>
+          <a:solidFill>
+            <a:srgbClr val="D97757"/>
+          </a:solidFill>
+          <a:ln>
+            <a:noFill/>
+          </a:ln>
+        </p:spPr>
+        <p:txBody>
+          <a:bodyPr wrap="square" lIns="0" tIns="0" rIns="0" bIns="0" rtlCol="0" anchor="ctr"/>
+          <a:lstStyle/>
+          <a:p>
+            <a:pPr algn="ctr" indent="0" marL="0">
+              <a:buNone/>
+            </a:pPr>
+            <a:r>
+              <a:rPr lang="en-US" sz="1600" b="1" kern="0" dirty="0">
+                <a:solidFill>
+                  <a:srgbClr val="FFFFFF"/>
+                </a:solidFill>
+                <a:latin typeface="Trebuchet MS" pitchFamily="34" charset="0"/>
+                <a:ea typeface="Trebuchet MS" pitchFamily="34" charset="-122"/>
+                <a:cs typeface="Trebuchet MS" pitchFamily="34" charset="-120"/>
+              </a:rPr>
+              <a:t>1</a:t>
+            </a:r>
+            <a:endParaRPr lang="en-US" sz="1600" dirty="0"/>
+          </a:p>
+        </p:txBody>
+      </p:sp>
+      <p:sp>
+        <p:nvSpPr>
+          <p:cNvPr id="10" name="Number 2"/>
+          <p:cNvSpPr/>
+          <p:nvPr/>
+        </p:nvSpPr>
+        <p:spPr>
+          <a:xfrm>
+            <a:off x="685800" y="2505840"/>
+            <a:ext cx="480000" cy="480000"/>
+          </a:xfrm>
+          <a:prstGeom prst="ellipse">
+            <a:avLst/>
+          </a:prstGeom>
+          <a:solidFill>
+            <a:srgbClr val="14B8A6"/>
+          </a:solidFill>
+          <a:ln>
+            <a:noFill/>
+          </a:ln>
+        </p:spPr>
+        <p:txBody>
+          <a:bodyPr wrap="square" lIns="0" tIns="0" rIns="0" bIns="0" rtlCol="0" anchor="ctr"/>
+          <a:lstStyle/>
+          <a:p>
+            <a:pPr algn="ctr" indent="0" marL="0">
+              <a:buNone/>
+            </a:pPr>
+            <a:r>
+              <a:rPr lang="en-US" sz="1600" b="1" kern="0" dirty="0">
+                <a:solidFill>
+                  <a:srgbClr val="FFFFFF"/>
+                </a:solidFill>
+                <a:latin typeface="Trebuchet MS" pitchFamily="34" charset="0"/>
+                <a:ea typeface="Trebuchet MS" pitchFamily="34" charset="-122"/>
+                <a:cs typeface="Trebuchet MS" pitchFamily="34" charset="-120"/>
+              </a:rPr>
+              <a:t>2</a:t>
+            </a:r>
+            <a:endParaRPr lang="en-US" sz="1600" dirty="0"/>
+          </a:p>
+        </p:txBody>
+      </p:sp>
+      <p:sp>
+        <p:nvSpPr>
+          <p:cNvPr id="11" name="Title 1"/>
+          <p:cNvSpPr/>
+          <p:nvPr/>
+        </p:nvSpPr>
+        <p:spPr>
+          <a:xfrm>
+            <a:off x="1320000" y="1185840"/>
+            <a:ext cx="6900000" cy="360000"/>
+          </a:xfrm>
+          <a:prstGeom prst="rect">
+            <a:avLst/>
+          </a:prstGeom>
+          <a:noFill/>
+          <a:ln/>
+        </p:spPr>
+        <p:txBody>
+          <a:bodyPr wrap="square" lIns="0" tIns="0" rIns="0" bIns="0" rtlCol="0" anchor="ctr"/>
+          <a:lstStyle/>
+          <a:p>
+            <a:pPr indent="0" marL="0">
+              <a:buNone/>
+            </a:pPr>
+            <a:r>
+              <a:rPr lang="en-US" sz="1600" b="1" kern="0" dirty="0">
+                <a:solidFill>
+                  <a:srgbClr val="0F1B3D"/>
+                </a:solidFill>
+                <a:latin typeface="Hiragino Sans" pitchFamily="34" charset="0"/>
+                <a:ea typeface="Hiragino Sans" pitchFamily="34" charset="-122"/>
+                <a:cs typeface="Hiragino Sans" pitchFamily="34" charset="-120"/>
+              </a:rPr>
+              <a:t>MCP で Gmail とつなぐ</a:t>
+            </a:r>
+            <a:endParaRPr lang="en-US" sz="1600" dirty="0"/>
+          </a:p>
+        </p:txBody>
+      </p:sp>
+      <p:sp>
+        <p:nvSpPr>
+          <p:cNvPr id="12" name="Path 1"/>
+          <p:cNvSpPr/>
+          <p:nvPr/>
+        </p:nvSpPr>
+        <p:spPr>
+          <a:xfrm>
+            <a:off x="1320000" y="1625840"/>
+            <a:ext cx="6900000" cy="400000"/>
+          </a:xfrm>
+          <a:prstGeom prst="rect">
+            <a:avLst/>
+          </a:prstGeom>
+          <a:noFill/>
+          <a:ln/>
+        </p:spPr>
+        <p:txBody>
+          <a:bodyPr wrap="square" lIns="0" tIns="0" rIns="0" bIns="0" rtlCol="0" anchor="ctr"/>
+          <a:lstStyle/>
+          <a:p>
+            <a:pPr indent="0" marL="0">
+              <a:buNone/>
+            </a:pPr>
+            <a:r>
+              <a:rPr lang="en-US" sz="1300" b="1" kern="0" dirty="0">
+                <a:solidFill>
+                  <a:srgbClr val="0F1B3D"/>
+                </a:solidFill>
+                <a:latin typeface="Hiragino Sans" pitchFamily="34" charset="0"/>
+                <a:ea typeface="Hiragino Sans" pitchFamily="34" charset="-122"/>
+                <a:cs typeface="Hiragino Sans" pitchFamily="34" charset="-120"/>
+              </a:rPr>
+              <a:t>Chat</a:t>
+            </a:r>
+            <a:r>
+              <a:rPr lang="en-US" sz="1300" kern="0" dirty="0">
+                <a:solidFill>
+                  <a:srgbClr val="94A3B8"/>
+                </a:solidFill>
+                <a:latin typeface="Hiragino Sans" pitchFamily="34" charset="0"/>
+                <a:ea typeface="Hiragino Sans" pitchFamily="34" charset="-122"/>
+                <a:cs typeface="Hiragino Sans" pitchFamily="34" charset="-120"/>
+              </a:rPr>
+              <a:t>　→　</a:t>
+            </a:r>
+            <a:r>
+              <a:rPr lang="en-US" sz="1300" b="1" kern="0" dirty="0">
+                <a:solidFill>
+                  <a:srgbClr val="0F1B3D"/>
+                </a:solidFill>
+                <a:latin typeface="Hiragino Sans" pitchFamily="34" charset="0"/>
+                <a:ea typeface="Hiragino Sans" pitchFamily="34" charset="-122"/>
+                <a:cs typeface="Hiragino Sans" pitchFamily="34" charset="-120"/>
+              </a:rPr>
+              <a:t>Customize</a:t>
+            </a:r>
+            <a:r>
+              <a:rPr lang="en-US" sz="1300" kern="0" dirty="0">
+                <a:solidFill>
+                  <a:srgbClr val="94A3B8"/>
+                </a:solidFill>
+                <a:latin typeface="Hiragino Sans" pitchFamily="34" charset="0"/>
+                <a:ea typeface="Hiragino Sans" pitchFamily="34" charset="-122"/>
+                <a:cs typeface="Hiragino Sans" pitchFamily="34" charset="-120"/>
+              </a:rPr>
+              <a:t>　→　</a:t>
+            </a:r>
+            <a:r>
+              <a:rPr lang="en-US" sz="1300" b="1" kern="0" dirty="0">
+                <a:solidFill>
+                  <a:srgbClr val="0F1B3D"/>
+                </a:solidFill>
+                <a:latin typeface="Hiragino Sans" pitchFamily="34" charset="0"/>
+                <a:ea typeface="Hiragino Sans" pitchFamily="34" charset="-122"/>
+                <a:cs typeface="Hiragino Sans" pitchFamily="34" charset="-120"/>
+              </a:rPr>
+              <a:t>コネクタ</a:t>
+            </a:r>
+            <a:r>
+              <a:rPr lang="en-US" sz="1300" kern="0" dirty="0">
+                <a:solidFill>
+                  <a:srgbClr val="94A3B8"/>
+                </a:solidFill>
+                <a:latin typeface="Hiragino Sans" pitchFamily="34" charset="0"/>
+                <a:ea typeface="Hiragino Sans" pitchFamily="34" charset="-122"/>
+                <a:cs typeface="Hiragino Sans" pitchFamily="34" charset="-120"/>
+              </a:rPr>
+              <a:t>　→　</a:t>
+            </a:r>
+            <a:r>
+              <a:rPr lang="en-US" sz="1300" b="1" kern="0" dirty="0">
+                <a:solidFill>
+                  <a:srgbClr val="0F1B3D"/>
+                </a:solidFill>
+                <a:latin typeface="Hiragino Sans" pitchFamily="34" charset="0"/>
+                <a:ea typeface="Hiragino Sans" pitchFamily="34" charset="-122"/>
+                <a:cs typeface="Hiragino Sans" pitchFamily="34" charset="-120"/>
+              </a:rPr>
+              <a:t>Gmail</a:t>
+            </a:r>
+            <a:endParaRPr lang="en-US" sz="1300" dirty="0"/>
+          </a:p>
+        </p:txBody>
+      </p:sp>
+      <p:sp>
+        <p:nvSpPr>
+          <p:cNvPr id="13" name="Title 2"/>
+          <p:cNvSpPr/>
+          <p:nvPr/>
+        </p:nvSpPr>
+        <p:spPr>
+          <a:xfrm>
+            <a:off x="1320000" y="2565840"/>
+            <a:ext cx="6900000" cy="360000"/>
+          </a:xfrm>
+          <a:prstGeom prst="rect">
+            <a:avLst/>
+          </a:prstGeom>
+          <a:noFill/>
+          <a:ln/>
+        </p:spPr>
+        <p:txBody>
+          <a:bodyPr wrap="square" lIns="0" tIns="0" rIns="0" bIns="0" rtlCol="0" anchor="ctr"/>
+          <a:lstStyle/>
+          <a:p>
+            <a:pPr indent="0" marL="0">
+              <a:buNone/>
+            </a:pPr>
+            <a:r>
+              <a:rPr lang="en-US" sz="1600" b="1" kern="0" dirty="0">
+                <a:solidFill>
+                  <a:srgbClr val="0F1B3D"/>
+                </a:solidFill>
+                <a:latin typeface="Hiragino Sans" pitchFamily="34" charset="0"/>
+                <a:ea typeface="Hiragino Sans" pitchFamily="34" charset="-122"/>
+                <a:cs typeface="Hiragino Sans" pitchFamily="34" charset="-120"/>
+              </a:rPr>
+              <a:t>スケジュールを作る</a:t>
+            </a:r>
+            <a:endParaRPr lang="en-US" sz="1600" dirty="0"/>
+          </a:p>
+        </p:txBody>
+      </p:sp>
+      <p:sp>
+        <p:nvSpPr>
+          <p:cNvPr id="14" name="Path 2"/>
+          <p:cNvSpPr/>
+          <p:nvPr/>
+        </p:nvSpPr>
+        <p:spPr>
+          <a:xfrm>
+            <a:off x="1320000" y="3025840"/>
+            <a:ext cx="7100000" cy="360000"/>
+          </a:xfrm>
+          <a:prstGeom prst="rect">
+            <a:avLst/>
+          </a:prstGeom>
+          <a:noFill/>
+          <a:ln/>
+        </p:spPr>
+        <p:txBody>
+          <a:bodyPr wrap="square" lIns="0" tIns="0" rIns="0" bIns="0" rtlCol="0" anchor="ctr"/>
+          <a:lstStyle/>
+          <a:p>
+            <a:pPr indent="0" marL="0">
+              <a:buNone/>
+            </a:pPr>
+            <a:r>
+              <a:rPr lang="en-US" sz="1300" b="1" kern="0" dirty="0">
+                <a:solidFill>
+                  <a:srgbClr val="0F1B3D"/>
+                </a:solidFill>
+                <a:latin typeface="Hiragino Sans" pitchFamily="34" charset="0"/>
+                <a:ea typeface="Hiragino Sans" pitchFamily="34" charset="-122"/>
+                <a:cs typeface="Hiragino Sans" pitchFamily="34" charset="-120"/>
+              </a:rPr>
+              <a:t>Cowork</a:t>
+            </a:r>
+            <a:r>
+              <a:rPr lang="en-US" sz="1300" kern="0" dirty="0">
+                <a:solidFill>
+                  <a:srgbClr val="94A3B8"/>
+                </a:solidFill>
+                <a:latin typeface="Hiragino Sans" pitchFamily="34" charset="0"/>
+                <a:ea typeface="Hiragino Sans" pitchFamily="34" charset="-122"/>
+                <a:cs typeface="Hiragino Sans" pitchFamily="34" charset="-120"/>
+              </a:rPr>
+              <a:t>　→　</a:t>
+            </a:r>
+            <a:r>
+              <a:rPr lang="en-US" sz="1300" b="1" kern="0" dirty="0">
+                <a:solidFill>
+                  <a:srgbClr val="0F1B3D"/>
+                </a:solidFill>
+                <a:latin typeface="Hiragino Sans" pitchFamily="34" charset="0"/>
+                <a:ea typeface="Hiragino Sans" pitchFamily="34" charset="-122"/>
+                <a:cs typeface="Hiragino Sans" pitchFamily="34" charset="-120"/>
+              </a:rPr>
+              <a:t>Scheduled</a:t>
+            </a:r>
+            <a:r>
+              <a:rPr lang="en-US" sz="1300" kern="0" dirty="0">
+                <a:solidFill>
+                  <a:srgbClr val="94A3B8"/>
+                </a:solidFill>
+                <a:latin typeface="Hiragino Sans" pitchFamily="34" charset="0"/>
+                <a:ea typeface="Hiragino Sans" pitchFamily="34" charset="-122"/>
+                <a:cs typeface="Hiragino Sans" pitchFamily="34" charset="-120"/>
+              </a:rPr>
+              <a:t>　→　</a:t>
+            </a:r>
+            <a:r>
+              <a:rPr lang="en-US" sz="1300" b="1" kern="0" dirty="0">
+                <a:solidFill>
+                  <a:srgbClr val="0F1B3D"/>
+                </a:solidFill>
+                <a:latin typeface="Hiragino Sans" pitchFamily="34" charset="0"/>
+                <a:ea typeface="Hiragino Sans" pitchFamily="34" charset="-122"/>
+                <a:cs typeface="Hiragino Sans" pitchFamily="34" charset="-120"/>
+              </a:rPr>
+              <a:t>New task</a:t>
+            </a:r>
+            <a:r>
+              <a:rPr lang="en-US" sz="1300" kern="0" dirty="0">
+                <a:solidFill>
+                  <a:srgbClr val="94A3B8"/>
+                </a:solidFill>
+                <a:latin typeface="Hiragino Sans" pitchFamily="34" charset="0"/>
+                <a:ea typeface="Hiragino Sans" pitchFamily="34" charset="-122"/>
+                <a:cs typeface="Hiragino Sans" pitchFamily="34" charset="-120"/>
+              </a:rPr>
+              <a:t>　→　</a:t>
+            </a:r>
+            <a:r>
+              <a:rPr lang="en-US" sz="1300" b="1" kern="0" dirty="0">
+                <a:solidFill>
+                  <a:srgbClr val="0F1B3D"/>
+                </a:solidFill>
+                <a:latin typeface="Hiragino Sans" pitchFamily="34" charset="0"/>
+                <a:ea typeface="Hiragino Sans" pitchFamily="34" charset="-122"/>
+                <a:cs typeface="Hiragino Sans" pitchFamily="34" charset="-120"/>
+              </a:rPr>
+              <a:t>Create with claude</a:t>
+            </a:r>
+            <a:endParaRPr lang="en-US" sz="1300" dirty="0"/>
+          </a:p>
+        </p:txBody>
+      </p:sp>
+      <p:sp>
+        <p:nvSpPr>
+          <p:cNvPr id="15" name="Prompt Box"/>
+          <p:cNvSpPr/>
+          <p:nvPr/>
+        </p:nvSpPr>
+        <p:spPr>
+          <a:xfrm>
+            <a:off x="1320000" y="3465840"/>
+            <a:ext cx="6900000" cy="540000"/>
+          </a:xfrm>
+          <a:prstGeom prst="roundRect">
+            <a:avLst>
+              <a:gd name="adj" fmla="val 12000"/>
+            </a:avLst>
+          </a:prstGeom>
+          <a:solidFill>
+            <a:srgbClr val="F1F5F9"/>
+          </a:solidFill>
+          <a:ln w="12700">
+            <a:solidFill>
+              <a:srgbClr val="E2E8F0"/>
+            </a:solidFill>
+            <a:prstDash val="solid"/>
+          </a:ln>
+        </p:spPr>
+        <p:txBody>
+          <a:bodyPr wrap="square" lIns="160020" tIns="0" rIns="160020" bIns="0" rtlCol="0" anchor="ctr"/>
+          <a:lstStyle/>
+          <a:p>
+            <a:pPr indent="0" marL="0">
+              <a:buNone/>
+            </a:pPr>
+            <a:r>
+              <a:rPr lang="en-US" sz="1100" b="1" kern="0" dirty="0">
+                <a:solidFill>
+                  <a:srgbClr val="14B8A6"/>
+                </a:solidFill>
+                <a:latin typeface="Hiragino Sans" pitchFamily="34" charset="0"/>
+                <a:ea typeface="Hiragino Sans" pitchFamily="34" charset="-122"/>
+                <a:cs typeface="Hiragino Sans" pitchFamily="34" charset="-120"/>
+              </a:rPr>
+              <a:t xml:space="preserve">入力 </a:t>
+            </a:r>
+            <a:r>
+              <a:rPr lang="en-US" sz="1200" kern="0" dirty="0">
+                <a:solidFill>
+                  <a:srgbClr val="0F1B3D"/>
+                </a:solidFill>
+                <a:latin typeface="Hiragino Sans" pitchFamily="34" charset="0"/>
+                <a:ea typeface="Hiragino Sans" pitchFamily="34" charset="-122"/>
+                <a:cs typeface="Hiragino Sans" pitchFamily="34" charset="-120"/>
+              </a:rPr>
+              <a:t>過去 7 日のメールをチェックして必要なアクションを抽出</a:t>
+            </a:r>
+            <a:endParaRPr lang="en-US" sz="1200" dirty="0"/>
+          </a:p>
+        </p:txBody>
+      </p:sp>
+      <p:sp>
+        <p:nvSpPr>
+          <p:cNvPr id="16" name="Action"/>
+          <p:cNvSpPr/>
+          <p:nvPr/>
+        </p:nvSpPr>
+        <p:spPr>
+          <a:xfrm>
+            <a:off x="1320000" y="4145840"/>
+            <a:ext cx="7100000" cy="360000"/>
+          </a:xfrm>
+          <a:prstGeom prst="rect">
+            <a:avLst/>
+          </a:prstGeom>
+          <a:noFill/>
+          <a:ln/>
+        </p:spPr>
+        <p:txBody>
+          <a:bodyPr wrap="square" lIns="0" tIns="0" rIns="0" bIns="0" rtlCol="0" anchor="ctr"/>
+          <a:lstStyle/>
+          <a:p>
+            <a:pPr indent="0" marL="0">
+              <a:buNone/>
+            </a:pPr>
+            <a:r>
+              <a:rPr lang="en-US" sz="1300" b="1" kern="0" dirty="0">
+                <a:solidFill>
+                  <a:srgbClr val="0F1B3D"/>
+                </a:solidFill>
+                <a:latin typeface="Hiragino Sans" pitchFamily="34" charset="0"/>
+                <a:ea typeface="Hiragino Sans" pitchFamily="34" charset="-122"/>
+                <a:cs typeface="Hiragino Sans" pitchFamily="34" charset="-120"/>
+              </a:rPr>
+              <a:t>[キュー]</a:t>
+            </a:r>
+            <a:r>
+              <a:rPr lang="en-US" sz="1300" kern="0" dirty="0">
+                <a:solidFill>
+                  <a:srgbClr val="94A3B8"/>
+                </a:solidFill>
+                <a:latin typeface="Hiragino Sans" pitchFamily="34" charset="0"/>
+                <a:ea typeface="Hiragino Sans" pitchFamily="34" charset="-122"/>
+                <a:cs typeface="Hiragino Sans" pitchFamily="34" charset="-120"/>
+              </a:rPr>
+              <a:t>　→　</a:t>
+            </a:r>
+            <a:r>
+              <a:rPr lang="en-US" sz="1300" b="1" kern="0" dirty="0">
+                <a:solidFill>
+                  <a:srgbClr val="0F1B3D"/>
+                </a:solidFill>
+                <a:latin typeface="Hiragino Sans" pitchFamily="34" charset="0"/>
+                <a:ea typeface="Hiragino Sans" pitchFamily="34" charset="-122"/>
+                <a:cs typeface="Hiragino Sans" pitchFamily="34" charset="-120"/>
+              </a:rPr>
+              <a:t>左上の [∨]</a:t>
+            </a:r>
+            <a:r>
+              <a:rPr lang="en-US" sz="1300" kern="0" dirty="0">
+                <a:solidFill>
+                  <a:srgbClr val="94A3B8"/>
+                </a:solidFill>
+                <a:latin typeface="Hiragino Sans" pitchFamily="34" charset="0"/>
+                <a:ea typeface="Hiragino Sans" pitchFamily="34" charset="-122"/>
+                <a:cs typeface="Hiragino Sans" pitchFamily="34" charset="-120"/>
+              </a:rPr>
+              <a:t>　→　</a:t>
+            </a:r>
+            <a:r>
+              <a:rPr lang="en-US" sz="1300" b="1" kern="0" dirty="0">
+                <a:solidFill>
+                  <a:srgbClr val="0F1B3D"/>
+                </a:solidFill>
+                <a:latin typeface="Hiragino Sans" pitchFamily="34" charset="0"/>
+                <a:ea typeface="Hiragino Sans" pitchFamily="34" charset="-122"/>
+                <a:cs typeface="Hiragino Sans" pitchFamily="34" charset="-120"/>
+              </a:rPr>
+              <a:t>スケジュール</a:t>
+            </a:r>
+            <a:endParaRPr lang="en-US" sz="1300" dirty="0"/>
+          </a:p>
+        </p:txBody>
+      </p:sp>
+    </p:spTree>
+  </p:cSld>
+  <p:clrMapOvr>
+    <a:masterClrMapping/>
+  </p:clrMapOvr>
+</p:sld>
+</file>
+
+<file path=ppt/slides/slide14.xml><?xml version="1.0" encoding="utf-8"?>
+<p:sld xmlns:a="http://schemas.openxmlformats.org/drawingml/2006/main" xmlns:r="http://schemas.openxmlformats.org/officeDocument/2006/relationships" xmlns:p="http://schemas.openxmlformats.org/presentationml/2006/main">
+  <p:cSld name="Slide Browser Operation">
+    <p:bg>
+      <p:bgPr>
+        <a:solidFill>
+          <a:srgbClr val="F6F8FB"/>
+        </a:solidFill>
+      </p:bgPr>
+    </p:bg>
+    <p:spTree>
+      <p:nvGrpSpPr>
+        <p:cNvPr id="1" name=""/>
+        <p:cNvGrpSpPr/>
+        <p:nvPr/>
+      </p:nvGrpSpPr>
+      <p:grpSpPr>
+        <a:xfrm>
+          <a:off x="0" y="0"/>
+          <a:ext cx="0" cy="0"/>
+          <a:chOff x="0" y="0"/>
+          <a:chExt cx="0" cy="0"/>
+        </a:xfrm>
+      </p:grpSpPr>
+      <p:sp>
+        <p:nvSpPr>
+          <p:cNvPr id="2" name="Header Bar"/>
+          <p:cNvSpPr/>
+          <p:nvPr/>
+        </p:nvSpPr>
+        <p:spPr>
+          <a:xfrm>
+            <a:off x="0" y="0"/>
+            <a:ext cx="9144000" cy="777240"/>
+          </a:xfrm>
+          <a:prstGeom prst="rect">
+            <a:avLst/>
+          </a:prstGeom>
+          <a:solidFill>
+            <a:srgbClr val="0F1B3D"/>
+          </a:solidFill>
+          <a:ln w="12700">
+            <a:solidFill>
+              <a:srgbClr val="0F1B3D"/>
+            </a:solidFill>
+            <a:prstDash val="solid"/>
+          </a:ln>
+        </p:spPr>
+      </p:sp>
+      <p:sp>
+        <p:nvSpPr>
+          <p:cNvPr id="3" name="Accent Tab"/>
+          <p:cNvSpPr/>
+          <p:nvPr/>
+        </p:nvSpPr>
+        <p:spPr>
+          <a:xfrm>
+            <a:off x="457200" y="164592"/>
+            <a:ext cx="73152" cy="457200"/>
+          </a:xfrm>
+          <a:prstGeom prst="rect">
+            <a:avLst/>
+          </a:prstGeom>
+          <a:solidFill>
+            <a:srgbClr val="D97757"/>
+          </a:solidFill>
+          <a:ln w="12700">
+            <a:solidFill>
+              <a:srgbClr val="D97757"/>
+            </a:solidFill>
+            <a:prstDash val="solid"/>
+          </a:ln>
+        </p:spPr>
+      </p:sp>
+      <p:sp>
+        <p:nvSpPr>
+          <p:cNvPr id="4" name="Title"/>
+          <p:cNvSpPr/>
+          <p:nvPr/>
+        </p:nvSpPr>
+        <p:spPr>
+          <a:xfrm>
+            <a:off x="685800" y="91440"/>
+            <a:ext cx="6858000" cy="411480"/>
+          </a:xfrm>
+          <a:prstGeom prst="rect">
+            <a:avLst/>
+          </a:prstGeom>
+          <a:noFill/>
+          <a:ln/>
+        </p:spPr>
+        <p:txBody>
+          <a:bodyPr wrap="square" lIns="0" tIns="0" rIns="0" bIns="0" rtlCol="0" anchor="ctr"/>
+          <a:lstStyle/>
+          <a:p>
+            <a:pPr indent="0" marL="0">
+              <a:buNone/>
+            </a:pPr>
+            <a:r>
+              <a:rPr lang="en-US" sz="2400" b="1" dirty="0">
+                <a:solidFill>
+                  <a:srgbClr val="FFFFFF"/>
+                </a:solidFill>
+                <a:latin typeface="Trebuchet MS" pitchFamily="34" charset="0"/>
+                <a:ea typeface="Trebuchet MS" pitchFamily="34" charset="-122"/>
+                <a:cs typeface="Trebuchet MS" pitchFamily="34" charset="-120"/>
+              </a:rPr>
+              <a:t>ブラウザを操作する</a:t>
+            </a:r>
+            <a:endParaRPr lang="en-US" sz="2400" dirty="0"/>
+          </a:p>
+        </p:txBody>
+      </p:sp>
+      <p:sp>
+        <p:nvSpPr>
+          <p:cNvPr id="5" name="Subtitle"/>
+          <p:cNvSpPr/>
+          <p:nvPr/>
+        </p:nvSpPr>
+        <p:spPr>
+          <a:xfrm>
+            <a:off x="685800" y="475488"/>
+            <a:ext cx="6858000" cy="237744"/>
+          </a:xfrm>
+          <a:prstGeom prst="rect">
+            <a:avLst/>
+          </a:prstGeom>
+          <a:noFill/>
+          <a:ln/>
+        </p:spPr>
+        <p:txBody>
+          <a:bodyPr wrap="square" lIns="0" tIns="0" rIns="0" bIns="0" rtlCol="0" anchor="ctr"/>
+          <a:lstStyle/>
+          <a:p>
+            <a:pPr indent="0" marL="0">
+              <a:buNone/>
+            </a:pPr>
+            <a:r>
+              <a:rPr lang="en-US" sz="1000" spc="400" kern="0" dirty="0">
+                <a:solidFill>
+                  <a:srgbClr val="9FB2D1"/>
+                </a:solidFill>
+                <a:latin typeface="Hiragino Sans" pitchFamily="34" charset="0"/>
+                <a:ea typeface="Hiragino Sans" pitchFamily="34" charset="-122"/>
+                <a:cs typeface="Hiragino Sans" pitchFamily="34" charset="-120"/>
+              </a:rPr>
+              <a:t>Operate the browser from the Code tab</a:t>
+            </a:r>
+            <a:endParaRPr lang="en-US" sz="1000" dirty="0"/>
+          </a:p>
+        </p:txBody>
+      </p:sp>
+      <p:sp>
+        <p:nvSpPr>
+          <p:cNvPr id="6" name="Page Number"/>
+          <p:cNvSpPr/>
+          <p:nvPr/>
+        </p:nvSpPr>
+        <p:spPr>
+          <a:xfrm>
+            <a:off x="7680960" y="274320"/>
+            <a:ext cx="1188720" cy="237744"/>
+          </a:xfrm>
+          <a:prstGeom prst="rect">
+            <a:avLst/>
+          </a:prstGeom>
+          <a:noFill/>
+          <a:ln/>
+        </p:spPr>
+        <p:txBody>
+          <a:bodyPr wrap="square" lIns="0" tIns="0" rIns="0" bIns="0" rtlCol="0" anchor="ctr"/>
+          <a:lstStyle/>
+          <a:p>
+            <a:pPr algn="r" indent="0" marL="0">
+              <a:buNone/>
+            </a:pPr>
+            <a:r>
+              <a:rPr lang="en-US" sz="1000" spc="300" kern="0" dirty="0">
+                <a:solidFill>
+                  <a:srgbClr val="D97757"/>
+                </a:solidFill>
+                <a:latin typeface="Hiragino Sans" pitchFamily="34" charset="0"/>
+                <a:ea typeface="Hiragino Sans" pitchFamily="34" charset="-122"/>
+                <a:cs typeface="Hiragino Sans" pitchFamily="34" charset="-120"/>
+              </a:rPr>
+              <a:t>14 / 14</a:t>
+            </a:r>
+            <a:endParaRPr lang="en-US" sz="1000" dirty="0"/>
+          </a:p>
+        </p:txBody>
+      </p:sp>
+      <p:sp>
+        <p:nvSpPr>
+          <p:cNvPr id="7" name="Card 1"/>
+          <p:cNvSpPr/>
+          <p:nvPr/>
+        </p:nvSpPr>
+        <p:spPr>
+          <a:xfrm>
+            <a:off x="457200" y="1005840"/>
+            <a:ext cx="8229600" cy="1100000"/>
+          </a:xfrm>
+          <a:prstGeom prst="rect">
+            <a:avLst/>
+          </a:prstGeom>
+          <a:solidFill>
+            <a:srgbClr val="FFFFFF"/>
+          </a:solidFill>
+          <a:ln w="12700">
+            <a:solidFill>
+              <a:srgbClr val="E2E8F0"/>
+            </a:solidFill>
+            <a:prstDash val="solid"/>
+          </a:ln>
+          <a:effectLst>
+            <a:outerShdw sx="100000" sy="100000" kx="0" ky="0" algn="bl" rotWithShape="0" blurRad="101600" dist="25400" dir="5400000">
+              <a:srgbClr val="000000">
+                <a:alpha val="6000"/>
+              </a:srgbClr>
+            </a:outerShdw>
+          </a:effectLst>
+        </p:spPr>
+      </p:sp>
+      <p:sp>
+        <p:nvSpPr>
+          <p:cNvPr id="8" name="Card 2"/>
+          <p:cNvSpPr/>
+          <p:nvPr/>
+        </p:nvSpPr>
+        <p:spPr>
+          <a:xfrm>
+            <a:off x="457200" y="2305840"/>
+            <a:ext cx="8229600" cy="2340000"/>
+          </a:xfrm>
+          <a:prstGeom prst="rect">
+            <a:avLst/>
+          </a:prstGeom>
+          <a:solidFill>
+            <a:srgbClr val="FFFFFF"/>
+          </a:solidFill>
+          <a:ln w="12700">
+            <a:solidFill>
+              <a:srgbClr val="E2E8F0"/>
+            </a:solidFill>
+            <a:prstDash val="solid"/>
+          </a:ln>
+          <a:effectLst>
+            <a:outerShdw sx="100000" sy="100000" kx="0" ky="0" algn="bl" rotWithShape="0" blurRad="101600" dist="25400" dir="5400000">
+              <a:srgbClr val="000000">
+                <a:alpha val="6000"/>
+              </a:srgbClr>
+            </a:outerShdw>
+          </a:effectLst>
+        </p:spPr>
+      </p:sp>
+      <p:sp>
+        <p:nvSpPr>
+          <p:cNvPr id="9" name="Number 1"/>
+          <p:cNvSpPr/>
+          <p:nvPr/>
+        </p:nvSpPr>
+        <p:spPr>
+          <a:xfrm>
+            <a:off x="685800" y="1125840"/>
+            <a:ext cx="480000" cy="480000"/>
+          </a:xfrm>
+          <a:prstGeom prst="ellipse">
+            <a:avLst/>
+          </a:prstGeom>
+          <a:solidFill>
+            <a:srgbClr val="D97757"/>
+          </a:solidFill>
+          <a:ln>
+            <a:noFill/>
+          </a:ln>
+        </p:spPr>
+        <p:txBody>
+          <a:bodyPr wrap="square" lIns="0" tIns="0" rIns="0" bIns="0" rtlCol="0" anchor="ctr"/>
+          <a:lstStyle/>
+          <a:p>
+            <a:pPr algn="ctr" indent="0" marL="0">
+              <a:buNone/>
+            </a:pPr>
+            <a:r>
+              <a:rPr lang="en-US" sz="1600" b="1" kern="0" dirty="0">
+                <a:solidFill>
+                  <a:srgbClr val="FFFFFF"/>
+                </a:solidFill>
+                <a:latin typeface="Trebuchet MS" pitchFamily="34" charset="0"/>
+                <a:ea typeface="Trebuchet MS" pitchFamily="34" charset="-122"/>
+                <a:cs typeface="Trebuchet MS" pitchFamily="34" charset="-120"/>
+              </a:rPr>
+              <a:t>1</a:t>
+            </a:r>
+            <a:endParaRPr lang="en-US" sz="1600" dirty="0"/>
+          </a:p>
+        </p:txBody>
+      </p:sp>
+      <p:sp>
+        <p:nvSpPr>
+          <p:cNvPr id="10" name="Number 2"/>
+          <p:cNvSpPr/>
+          <p:nvPr/>
+        </p:nvSpPr>
+        <p:spPr>
+          <a:xfrm>
+            <a:off x="685800" y="2425840"/>
+            <a:ext cx="480000" cy="480000"/>
+          </a:xfrm>
+          <a:prstGeom prst="ellipse">
+            <a:avLst/>
+          </a:prstGeom>
+          <a:solidFill>
+            <a:srgbClr val="14B8A6"/>
+          </a:solidFill>
+          <a:ln>
+            <a:noFill/>
+          </a:ln>
+        </p:spPr>
+        <p:txBody>
+          <a:bodyPr wrap="square" lIns="0" tIns="0" rIns="0" bIns="0" rtlCol="0" anchor="ctr"/>
+          <a:lstStyle/>
+          <a:p>
+            <a:pPr algn="ctr" indent="0" marL="0">
+              <a:buNone/>
+            </a:pPr>
+            <a:r>
+              <a:rPr lang="en-US" sz="1600" b="1" kern="0" dirty="0">
+                <a:solidFill>
+                  <a:srgbClr val="FFFFFF"/>
+                </a:solidFill>
+                <a:latin typeface="Trebuchet MS" pitchFamily="34" charset="0"/>
+                <a:ea typeface="Trebuchet MS" pitchFamily="34" charset="-122"/>
+                <a:cs typeface="Trebuchet MS" pitchFamily="34" charset="-120"/>
+              </a:rPr>
+              <a:t>2</a:t>
+            </a:r>
+            <a:endParaRPr lang="en-US" sz="1600" dirty="0"/>
+          </a:p>
+        </p:txBody>
+      </p:sp>
+      <p:sp>
+        <p:nvSpPr>
+          <p:cNvPr id="11" name="Title 1"/>
+          <p:cNvSpPr/>
+          <p:nvPr/>
+        </p:nvSpPr>
+        <p:spPr>
+          <a:xfrm>
+            <a:off x="1320000" y="1185840"/>
+            <a:ext cx="6900000" cy="360000"/>
+          </a:xfrm>
+          <a:prstGeom prst="rect">
+            <a:avLst/>
+          </a:prstGeom>
+          <a:noFill/>
+          <a:ln/>
+        </p:spPr>
+        <p:txBody>
+          <a:bodyPr wrap="square" lIns="0" tIns="0" rIns="0" bIns="0" rtlCol="0" anchor="ctr"/>
+          <a:lstStyle/>
+          <a:p>
+            <a:pPr indent="0" marL="0">
+              <a:buNone/>
+            </a:pPr>
+            <a:r>
+              <a:rPr lang="en-US" sz="1600" b="1" kern="0" dirty="0">
+                <a:solidFill>
+                  <a:srgbClr val="0F1B3D"/>
+                </a:solidFill>
+                <a:latin typeface="Hiragino Sans" pitchFamily="34" charset="0"/>
+                <a:ea typeface="Hiragino Sans" pitchFamily="34" charset="-122"/>
+                <a:cs typeface="Hiragino Sans" pitchFamily="34" charset="-120"/>
+              </a:rPr>
+              <a:t>ブラウザ操作を有効化</a:t>
+            </a:r>
+            <a:endParaRPr lang="en-US" sz="1600" dirty="0"/>
+          </a:p>
+        </p:txBody>
+      </p:sp>
+      <p:sp>
+        <p:nvSpPr>
+          <p:cNvPr id="12" name="Path 1"/>
+          <p:cNvSpPr/>
+          <p:nvPr/>
+        </p:nvSpPr>
+        <p:spPr>
+          <a:xfrm>
+            <a:off x="1320000" y="1585840"/>
+            <a:ext cx="7200000" cy="400000"/>
+          </a:xfrm>
+          <a:prstGeom prst="rect">
+            <a:avLst/>
+          </a:prstGeom>
+          <a:noFill/>
+          <a:ln/>
+        </p:spPr>
+        <p:txBody>
+          <a:bodyPr wrap="square" lIns="0" tIns="0" rIns="0" bIns="0" rtlCol="0" anchor="ctr"/>
+          <a:lstStyle/>
+          <a:p>
+            <a:pPr indent="0" marL="0">
+              <a:buNone/>
+            </a:pPr>
+            <a:r>
+              <a:rPr lang="en-US" sz="1300" b="1" kern="0" dirty="0">
+                <a:solidFill>
+                  <a:srgbClr val="0F1B3D"/>
+                </a:solidFill>
+                <a:latin typeface="Hiragino Sans" pitchFamily="34" charset="0"/>
+                <a:ea typeface="Hiragino Sans" pitchFamily="34" charset="-122"/>
+                <a:cs typeface="Hiragino Sans" pitchFamily="34" charset="-120"/>
+              </a:rPr>
+              <a:t>設定</a:t>
+            </a:r>
+            <a:r>
+              <a:rPr lang="en-US" sz="1300" kern="0" dirty="0">
+                <a:solidFill>
+                  <a:srgbClr val="94A3B8"/>
+                </a:solidFill>
+                <a:latin typeface="Hiragino Sans" pitchFamily="34" charset="0"/>
+                <a:ea typeface="Hiragino Sans" pitchFamily="34" charset="-122"/>
+                <a:cs typeface="Hiragino Sans" pitchFamily="34" charset="-120"/>
+              </a:rPr>
+              <a:t>　→　</a:t>
+            </a:r>
+            <a:r>
+              <a:rPr lang="en-US" sz="1300" b="1" kern="0" dirty="0">
+                <a:solidFill>
+                  <a:srgbClr val="0F1B3D"/>
+                </a:solidFill>
+                <a:latin typeface="Hiragino Sans" pitchFamily="34" charset="0"/>
+                <a:ea typeface="Hiragino Sans" pitchFamily="34" charset="-122"/>
+                <a:cs typeface="Hiragino Sans" pitchFamily="34" charset="-120"/>
+              </a:rPr>
+              <a:t>一般（デスクトップアプリ）</a:t>
+            </a:r>
+            <a:r>
+              <a:rPr lang="en-US" sz="1300" kern="0" dirty="0">
+                <a:solidFill>
+                  <a:srgbClr val="94A3B8"/>
+                </a:solidFill>
+                <a:latin typeface="Hiragino Sans" pitchFamily="34" charset="0"/>
+                <a:ea typeface="Hiragino Sans" pitchFamily="34" charset="-122"/>
+                <a:cs typeface="Hiragino Sans" pitchFamily="34" charset="-120"/>
+              </a:rPr>
+              <a:t>　→　</a:t>
+            </a:r>
+            <a:r>
+              <a:rPr lang="en-US" sz="1300" b="1" kern="0" dirty="0">
+                <a:solidFill>
+                  <a:srgbClr val="0F1B3D"/>
+                </a:solidFill>
+                <a:latin typeface="Hiragino Sans" pitchFamily="34" charset="0"/>
+                <a:ea typeface="Hiragino Sans" pitchFamily="34" charset="-122"/>
+                <a:cs typeface="Hiragino Sans" pitchFamily="34" charset="-120"/>
+              </a:rPr>
+              <a:t>すべてのブラウザアクションを許可</a:t>
+            </a:r>
+            <a:endParaRPr lang="en-US" sz="1300" dirty="0"/>
+          </a:p>
+        </p:txBody>
+      </p:sp>
+      <p:sp>
+        <p:nvSpPr>
+          <p:cNvPr id="13" name="Title 2"/>
+          <p:cNvSpPr/>
+          <p:nvPr/>
+        </p:nvSpPr>
+        <p:spPr>
+          <a:xfrm>
+            <a:off x="1320000" y="2485840"/>
+            <a:ext cx="6900000" cy="360000"/>
+          </a:xfrm>
+          <a:prstGeom prst="rect">
+            <a:avLst/>
+          </a:prstGeom>
+          <a:noFill/>
+          <a:ln/>
+        </p:spPr>
+        <p:txBody>
+          <a:bodyPr wrap="square" lIns="0" tIns="0" rIns="0" bIns="0" rtlCol="0" anchor="ctr"/>
+          <a:lstStyle/>
+          <a:p>
+            <a:pPr indent="0" marL="0">
+              <a:buNone/>
+            </a:pPr>
+            <a:r>
+              <a:rPr lang="en-US" sz="1600" b="1" kern="0" dirty="0">
+                <a:solidFill>
+                  <a:srgbClr val="0F1B3D"/>
+                </a:solidFill>
+                <a:latin typeface="Hiragino Sans" pitchFamily="34" charset="0"/>
+                <a:ea typeface="Hiragino Sans" pitchFamily="34" charset="-122"/>
+                <a:cs typeface="Hiragino Sans" pitchFamily="34" charset="-120"/>
+              </a:rPr>
+              <a:t>Code タブから入力</a:t>
+            </a:r>
+            <a:endParaRPr lang="en-US" sz="1600" dirty="0"/>
+          </a:p>
+        </p:txBody>
+      </p:sp>
+      <p:sp>
+        <p:nvSpPr>
+          <p:cNvPr id="15" name="Prompt Box A"/>
+          <p:cNvSpPr/>
+          <p:nvPr/>
+        </p:nvSpPr>
+        <p:spPr>
+          <a:xfrm>
+            <a:off x="1320000" y="2945840"/>
+            <a:ext cx="7160000" cy="820000"/>
+          </a:xfrm>
+          <a:prstGeom prst="roundRect">
+            <a:avLst>
+              <a:gd name="adj" fmla="val 10000"/>
+            </a:avLst>
+          </a:prstGeom>
+          <a:solidFill>
+            <a:srgbClr val="F1F5F9"/>
+          </a:solidFill>
+          <a:ln w="12700">
+            <a:solidFill>
+              <a:srgbClr val="E2E8F0"/>
+            </a:solidFill>
+            <a:prstDash val="solid"/>
+          </a:ln>
+        </p:spPr>
+        <p:txBody>
+          <a:bodyPr wrap="square" lIns="160020" tIns="0" rIns="160020" bIns="0" rtlCol="0" anchor="ctr"/>
+          <a:lstStyle/>
+          <a:p>
+            <a:pPr indent="0" marL="0">
+              <a:buNone/>
+            </a:pPr>
+            <a:r>
+              <a:rPr lang="en-US" sz="1100" b="1" kern="0" dirty="0">
+                <a:solidFill>
+                  <a:srgbClr val="14B8A6"/>
+                </a:solidFill>
+                <a:latin typeface="Hiragino Sans" pitchFamily="34" charset="0"/>
+                <a:ea typeface="Hiragino Sans" pitchFamily="34" charset="-122"/>
+                <a:cs typeface="Hiragino Sans" pitchFamily="34" charset="-120"/>
+              </a:rPr>
+              <a:t xml:space="preserve">入力 </a:t>
+            </a:r>
+            <a:r>
+              <a:rPr lang="en-US" sz="1200" b="1" kern="0" dirty="0">
+                <a:solidFill>
+                  <a:srgbClr val="0F1B3D"/>
+                </a:solidFill>
+                <a:latin typeface="Hiragino Sans" pitchFamily="34" charset="0"/>
+                <a:ea typeface="Hiragino Sans" pitchFamily="34" charset="-122"/>
+                <a:cs typeface="Hiragino Sans" pitchFamily="34" charset="-120"/>
+              </a:rPr>
+              <a:t>X.com を開いて、以下の文章を投稿</a:t>
+            </a:r>
+            <a:endParaRPr lang="en-US" sz="1200" dirty="0"/>
+          </a:p>
+          <a:p>
+            <a:pPr indent="0" marL="0">
+              <a:buNone/>
+            </a:pPr>
+            <a:r>
+              <a:rPr lang="en-US" sz="1100" kern="0" dirty="0">
+                <a:solidFill>
+                  <a:srgbClr val="475569"/>
+                </a:solidFill>
+                <a:latin typeface="Hiragino Sans" pitchFamily="34" charset="0"/>
+                <a:ea typeface="Hiragino Sans" pitchFamily="34" charset="-122"/>
+                <a:cs typeface="Hiragino Sans" pitchFamily="34" charset="-120"/>
+              </a:rPr>
+              <a:t>「ブラウザから投稿できるのにAPI経由だと投稿が有料なのは意味が解らない。AIで自動投稿ナウ」</a:t>
+            </a:r>
+            <a:endParaRPr lang="en-US" sz="1100" dirty="0"/>
+          </a:p>
+        </p:txBody>
+      </p:sp>
+      <p:sp>
+        <p:nvSpPr>
+          <p:cNvPr id="16" name="Prompt Box B"/>
+          <p:cNvSpPr/>
+          <p:nvPr/>
+        </p:nvSpPr>
+        <p:spPr>
+          <a:xfrm>
+            <a:off x="1320000" y="3865840"/>
+            <a:ext cx="7160000" cy="620000"/>
+          </a:xfrm>
+          <a:prstGeom prst="roundRect">
+            <a:avLst>
+              <a:gd name="adj" fmla="val 13000"/>
+            </a:avLst>
+          </a:prstGeom>
+          <a:solidFill>
+            <a:srgbClr val="F1F5F9"/>
+          </a:solidFill>
+          <a:ln w="12700">
+            <a:solidFill>
+              <a:srgbClr val="E2E8F0"/>
+            </a:solidFill>
+            <a:prstDash val="solid"/>
+          </a:ln>
+        </p:spPr>
+        <p:txBody>
+          <a:bodyPr wrap="square" lIns="160020" tIns="0" rIns="160020" bIns="0" rtlCol="0" anchor="ctr"/>
+          <a:lstStyle/>
+          <a:p>
+            <a:pPr indent="0" marL="0">
+              <a:buNone/>
+            </a:pPr>
+            <a:r>
+              <a:rPr lang="en-US" sz="1100" b="1" kern="0" dirty="0">
+                <a:solidFill>
+                  <a:srgbClr val="14B8A6"/>
+                </a:solidFill>
+                <a:latin typeface="Hiragino Sans" pitchFamily="34" charset="0"/>
+                <a:ea typeface="Hiragino Sans" pitchFamily="34" charset="-122"/>
+                <a:cs typeface="Hiragino Sans" pitchFamily="34" charset="-120"/>
+              </a:rPr>
+              <a:t xml:space="preserve">入力 </a:t>
+            </a:r>
+            <a:r>
+              <a:rPr lang="en-US" sz="1200" b="1" kern="0" dirty="0">
+                <a:solidFill>
+                  <a:srgbClr val="0F1B3D"/>
+                </a:solidFill>
+                <a:latin typeface="Hiragino Sans" pitchFamily="34" charset="0"/>
+                <a:ea typeface="Hiragino Sans" pitchFamily="34" charset="-122"/>
+                <a:cs typeface="Hiragino Sans" pitchFamily="34" charset="-120"/>
+              </a:rPr>
+              <a:t>ブラウザで Amazon のプライムユーザかどうか調べて</a:t>
+            </a:r>
+            <a:endParaRPr lang="en-US" sz="1200" dirty="0"/>
           </a:p>
         </p:txBody>
       </p:sp>
@@ -3217,7 +4643,7 @@
                 <a:ea typeface="Hiragino Sans" pitchFamily="34" charset="-122"/>
                 <a:cs typeface="Hiragino Sans" pitchFamily="34" charset="-120"/>
               </a:rPr>
-              <a:t>04 / 12</a:t>
+              <a:t>04 / 14</a:t>
             </a:r>
             <a:endParaRPr lang="en-US" sz="1000" dirty="0"/>
           </a:p>
@@ -4960,7 +6386,7 @@
                 <a:ea typeface="Hiragino Sans" pitchFamily="34" charset="-122"/>
                 <a:cs typeface="Hiragino Sans" pitchFamily="34" charset="-120"/>
               </a:rPr>
-              <a:t>05 / 12</a:t>
+              <a:t>05 / 14</a:t>
             </a:r>
             <a:endParaRPr lang="en-US" sz="1000" dirty="0"/>
           </a:p>
@@ -8744,7 +10170,7 @@
                 <a:ea typeface="Hiragino Sans" pitchFamily="34" charset="-122"/>
                 <a:cs typeface="Hiragino Sans" pitchFamily="34" charset="-120"/>
               </a:rPr>
-              <a:t>06 / 12</a:t>
+              <a:t>06 / 14</a:t>
             </a:r>
             <a:endParaRPr lang="en-US" sz="1000" dirty="0"/>
           </a:p>
@@ -8943,7 +10369,7 @@
                 <a:ea typeface="Hiragino Sans" pitchFamily="34" charset="-122"/>
                 <a:cs typeface="Hiragino Sans" pitchFamily="34" charset="-120"/>
               </a:rPr>
-              <a:t>07 / 12</a:t>
+              <a:t>07 / 14</a:t>
             </a:r>
             <a:endParaRPr lang="en-US" sz="1000" dirty="0"/>
           </a:p>
@@ -10980,7 +12406,7 @@
                 <a:ea typeface="Hiragino Sans" pitchFamily="34" charset="-122"/>
                 <a:cs typeface="Hiragino Sans" pitchFamily="34" charset="-120"/>
               </a:rPr>
-              <a:t>08 / 12</a:t>
+              <a:t>08 / 14</a:t>
             </a:r>
             <a:endParaRPr lang="en-US" sz="1000" dirty="0"/>
           </a:p>
@@ -12929,7 +14355,7 @@
                 <a:ea typeface="Hiragino Sans" pitchFamily="34" charset="-122"/>
                 <a:cs typeface="Hiragino Sans" pitchFamily="34" charset="-120"/>
               </a:rPr>
-              <a:t>09 / 12</a:t>
+              <a:t>09 / 14</a:t>
             </a:r>
             <a:endParaRPr lang="en-US" sz="1000" dirty="0"/>
           </a:p>
@@ -13128,7 +14554,7 @@
                 <a:ea typeface="Hiragino Sans" pitchFamily="34" charset="-122"/>
                 <a:cs typeface="Hiragino Sans" pitchFamily="34" charset="-120"/>
               </a:rPr>
-              <a:t>10 / 12</a:t>
+              <a:t>10 / 14</a:t>
             </a:r>
             <a:endParaRPr lang="en-US" sz="1000" dirty="0"/>
           </a:p>
@@ -14297,7 +15723,7 @@
                 <a:ea typeface="Hiragino Sans" pitchFamily="34" charset="-122"/>
                 <a:cs typeface="Hiragino Sans" pitchFamily="34" charset="-120"/>
               </a:rPr>
-              <a:t>02 / 12</a:t>
+              <a:t>02 / 14</a:t>
             </a:r>
             <a:endParaRPr lang="en-US" sz="1000" dirty="0"/>
           </a:p>
